--- a/p01/VR-A-Frame-introduction.pptx
+++ b/p01/VR-A-Frame-introduction.pptx
@@ -19,10 +19,11 @@
     <p:sldId id="267" r:id="rId13"/>
     <p:sldId id="273" r:id="rId14"/>
     <p:sldId id="274" r:id="rId15"/>
-    <p:sldId id="290" r:id="rId16"/>
-    <p:sldId id="293" r:id="rId17"/>
-    <p:sldId id="268" r:id="rId18"/>
-    <p:sldId id="272" r:id="rId19"/>
+    <p:sldId id="295" r:id="rId16"/>
+    <p:sldId id="290" r:id="rId17"/>
+    <p:sldId id="293" r:id="rId18"/>
+    <p:sldId id="268" r:id="rId19"/>
+    <p:sldId id="272" r:id="rId20"/>
   </p:sldIdLst>
   <p:sldSz cx="12192000" cy="6858000"/>
   <p:notesSz cx="6858000" cy="9144000"/>
@@ -3287,7 +3288,7 @@
           <a:p>
             <a:fld id="{846CE7D5-CF57-46EF-B807-FDD0502418D4}" type="datetimeFigureOut">
               <a:rPr lang="en-US" smtClean="0"/>
-              <a:t>5/20/2026</a:t>
+              <a:t>10/7/2026</a:t>
             </a:fld>
             <a:endParaRPr lang="en-US"/>
           </a:p>
@@ -3457,7 +3458,7 @@
           <a:p>
             <a:fld id="{846CE7D5-CF57-46EF-B807-FDD0502418D4}" type="datetimeFigureOut">
               <a:rPr lang="en-US" smtClean="0"/>
-              <a:t>5/20/2026</a:t>
+              <a:t>10/7/2026</a:t>
             </a:fld>
             <a:endParaRPr lang="en-US"/>
           </a:p>
@@ -3637,7 +3638,7 @@
           <a:p>
             <a:fld id="{846CE7D5-CF57-46EF-B807-FDD0502418D4}" type="datetimeFigureOut">
               <a:rPr lang="en-US" smtClean="0"/>
-              <a:t>5/20/2026</a:t>
+              <a:t>10/7/2026</a:t>
             </a:fld>
             <a:endParaRPr lang="en-US"/>
           </a:p>
@@ -3807,7 +3808,7 @@
           <a:p>
             <a:fld id="{846CE7D5-CF57-46EF-B807-FDD0502418D4}" type="datetimeFigureOut">
               <a:rPr lang="en-US" smtClean="0"/>
-              <a:t>5/20/2026</a:t>
+              <a:t>10/7/2026</a:t>
             </a:fld>
             <a:endParaRPr lang="en-US"/>
           </a:p>
@@ -4053,7 +4054,7 @@
           <a:p>
             <a:fld id="{846CE7D5-CF57-46EF-B807-FDD0502418D4}" type="datetimeFigureOut">
               <a:rPr lang="en-US" smtClean="0"/>
-              <a:t>5/20/2026</a:t>
+              <a:t>10/7/2026</a:t>
             </a:fld>
             <a:endParaRPr lang="en-US"/>
           </a:p>
@@ -4285,7 +4286,7 @@
           <a:p>
             <a:fld id="{846CE7D5-CF57-46EF-B807-FDD0502418D4}" type="datetimeFigureOut">
               <a:rPr lang="en-US" smtClean="0"/>
-              <a:t>5/20/2026</a:t>
+              <a:t>10/7/2026</a:t>
             </a:fld>
             <a:endParaRPr lang="en-US"/>
           </a:p>
@@ -4652,7 +4653,7 @@
           <a:p>
             <a:fld id="{846CE7D5-CF57-46EF-B807-FDD0502418D4}" type="datetimeFigureOut">
               <a:rPr lang="en-US" smtClean="0"/>
-              <a:t>5/20/2026</a:t>
+              <a:t>10/7/2026</a:t>
             </a:fld>
             <a:endParaRPr lang="en-US"/>
           </a:p>
@@ -4770,7 +4771,7 @@
           <a:p>
             <a:fld id="{846CE7D5-CF57-46EF-B807-FDD0502418D4}" type="datetimeFigureOut">
               <a:rPr lang="en-US" smtClean="0"/>
-              <a:t>5/20/2026</a:t>
+              <a:t>10/7/2026</a:t>
             </a:fld>
             <a:endParaRPr lang="en-US"/>
           </a:p>
@@ -4865,7 +4866,7 @@
           <a:p>
             <a:fld id="{846CE7D5-CF57-46EF-B807-FDD0502418D4}" type="datetimeFigureOut">
               <a:rPr lang="en-US" smtClean="0"/>
-              <a:t>5/20/2026</a:t>
+              <a:t>10/7/2026</a:t>
             </a:fld>
             <a:endParaRPr lang="en-US"/>
           </a:p>
@@ -5142,7 +5143,7 @@
           <a:p>
             <a:fld id="{846CE7D5-CF57-46EF-B807-FDD0502418D4}" type="datetimeFigureOut">
               <a:rPr lang="en-US" smtClean="0"/>
-              <a:t>5/20/2026</a:t>
+              <a:t>10/7/2026</a:t>
             </a:fld>
             <a:endParaRPr lang="en-US"/>
           </a:p>
@@ -5399,7 +5400,7 @@
           <a:p>
             <a:fld id="{846CE7D5-CF57-46EF-B807-FDD0502418D4}" type="datetimeFigureOut">
               <a:rPr lang="en-US" smtClean="0"/>
-              <a:t>5/20/2026</a:t>
+              <a:t>10/7/2026</a:t>
             </a:fld>
             <a:endParaRPr lang="en-US"/>
           </a:p>
@@ -5612,7 +5613,7 @@
           <a:p>
             <a:fld id="{846CE7D5-CF57-46EF-B807-FDD0502418D4}" type="datetimeFigureOut">
               <a:rPr lang="en-US" smtClean="0"/>
-              <a:t>5/20/2026</a:t>
+              <a:t>10/7/2026</a:t>
             </a:fld>
             <a:endParaRPr lang="en-US"/>
           </a:p>
@@ -8120,7 +8121,6 @@
               <a:spcBef>
                 <a:spcPts val="0"/>
               </a:spcBef>
-              <a:buFont typeface="Arial" panose="020B0604020202020204" pitchFamily="34" charset="0"/>
               <a:buNone/>
             </a:pPr>
             <a:r>
@@ -8131,7 +8131,7 @@
                   </a:schemeClr>
                 </a:solidFill>
               </a:rPr>
-              <a:t>      &lt;a-sky color="#0000EE“&gt;</a:t>
+              <a:t>      &lt;a-sky color="#0000EE"&gt;</a:t>
             </a:r>
           </a:p>
           <a:p>
@@ -8142,7 +8142,6 @@
               <a:spcBef>
                 <a:spcPts val="0"/>
               </a:spcBef>
-              <a:buFont typeface="Arial" panose="020B0604020202020204" pitchFamily="34" charset="0"/>
               <a:buNone/>
             </a:pPr>
             <a:r>
@@ -8773,16 +8772,13 @@
             </a:r>
           </a:p>
           <a:p>
-            <a:pPr marL="0" indent="0">
-              <a:buNone/>
-            </a:pPr>
             <a:r>
               <a:rPr lang="en-US" dirty="0">
                 <a:solidFill>
                   <a:srgbClr val="7030A0"/>
                 </a:solidFill>
               </a:rPr>
-              <a:t>        position="0  -1  -5“     </a:t>
+              <a:t>   position="0  -1  -5"    </a:t>
             </a:r>
             <a:r>
               <a:rPr lang="en-US" dirty="0">
@@ -8963,10 +8959,7 @@
                 <a:pPr/>
                 <a14:m>
                   <m:oMathPara xmlns:m="http://schemas.openxmlformats.org/officeDocument/2006/math">
-                    <m:oMathParaPr>
-                      <m:jc m:val="centerGroup"/>
-                    </m:oMathParaPr>
-                    <m:oMath xmlns:m="http://schemas.openxmlformats.org/officeDocument/2006/math">
+                    <m:oMath>
                       <m:r>
                         <a:rPr lang="en-US" sz="3600" b="0" i="1" smtClean="0">
                           <a:latin typeface="Cambria Math" panose="02040503050406030204" pitchFamily="18" charset="0"/>
@@ -9059,10 +9052,7 @@
                 <a:pPr/>
                 <a14:m>
                   <m:oMathPara xmlns:m="http://schemas.openxmlformats.org/officeDocument/2006/math">
-                    <m:oMathParaPr>
-                      <m:jc m:val="centerGroup"/>
-                    </m:oMathParaPr>
-                    <m:oMath xmlns:m="http://schemas.openxmlformats.org/officeDocument/2006/math">
+                    <m:oMath>
                       <m:r>
                         <a:rPr lang="en-US" sz="3600" b="0" i="1" smtClean="0">
                           <a:latin typeface="Cambria Math" panose="02040503050406030204" pitchFamily="18" charset="0"/>
@@ -9235,10 +9225,7 @@
                 <a:pPr/>
                 <a14:m>
                   <m:oMathPara xmlns:m="http://schemas.openxmlformats.org/officeDocument/2006/math">
-                    <m:oMathParaPr>
-                      <m:jc m:val="centerGroup"/>
-                    </m:oMathParaPr>
-                    <m:oMath xmlns:m="http://schemas.openxmlformats.org/officeDocument/2006/math">
+                    <m:oMath>
                       <m:r>
                         <a:rPr lang="en-US" sz="3600" b="0" i="1" smtClean="0">
                           <a:solidFill>
@@ -9358,7 +9345,7 @@
           <a:p>
             <a:r>
               <a:rPr lang="en-US" dirty="0"/>
-              <a:t>simple-sky.html: changing the view</a:t>
+              <a:t>simple-sky.html: basic color</a:t>
             </a:r>
           </a:p>
         </p:txBody>
@@ -9655,6 +9642,621 @@
           <p:cNvPr id="2" name="Title 1">
             <a:extLst>
               <a:ext uri="{FF2B5EF4-FFF2-40B4-BE49-F238E27FC236}">
+                <a16:creationId xmlns:a16="http://schemas.microsoft.com/office/drawing/2014/main" id="{E7570626-CD49-7D93-86DB-1811FB5856D5}"/>
+              </a:ext>
+            </a:extLst>
+          </p:cNvPr>
+          <p:cNvSpPr>
+            <a:spLocks noGrp="1"/>
+          </p:cNvSpPr>
+          <p:nvPr>
+            <p:ph type="title"/>
+          </p:nvPr>
+        </p:nvSpPr>
+        <p:spPr/>
+        <p:txBody>
+          <a:bodyPr/>
+          <a:lstStyle/>
+          <a:p>
+            <a:r>
+              <a:rPr lang="en-US" dirty="0"/>
+              <a:t>simple-sky.html: changing the view</a:t>
+            </a:r>
+          </a:p>
+        </p:txBody>
+      </p:sp>
+      <p:sp>
+        <p:nvSpPr>
+          <p:cNvPr id="3" name="Content Placeholder 2">
+            <a:extLst>
+              <a:ext uri="{FF2B5EF4-FFF2-40B4-BE49-F238E27FC236}">
+                <a16:creationId xmlns:a16="http://schemas.microsoft.com/office/drawing/2014/main" id="{3CE70610-1A5A-5971-6517-6340E3BB76AC}"/>
+              </a:ext>
+            </a:extLst>
+          </p:cNvPr>
+          <p:cNvSpPr>
+            <a:spLocks noGrp="1"/>
+          </p:cNvSpPr>
+          <p:nvPr>
+            <p:ph idx="1"/>
+          </p:nvPr>
+        </p:nvSpPr>
+        <p:spPr/>
+        <p:txBody>
+          <a:bodyPr>
+            <a:normAutofit fontScale="25000" lnSpcReduction="20000"/>
+          </a:bodyPr>
+          <a:lstStyle/>
+          <a:p>
+            <a:pPr marL="0" indent="0">
+              <a:lnSpc>
+                <a:spcPct val="120000"/>
+              </a:lnSpc>
+              <a:buNone/>
+            </a:pPr>
+            <a:r>
+              <a:rPr lang="en-US" dirty="0"/>
+              <a:t> </a:t>
+            </a:r>
+            <a:r>
+              <a:rPr lang="en-US" sz="4800" dirty="0"/>
+              <a:t>&lt;script&gt;</a:t>
+            </a:r>
+          </a:p>
+          <a:p>
+            <a:pPr marL="0" indent="0">
+              <a:lnSpc>
+                <a:spcPct val="120000"/>
+              </a:lnSpc>
+              <a:spcBef>
+                <a:spcPts val="0"/>
+              </a:spcBef>
+              <a:buNone/>
+            </a:pPr>
+            <a:r>
+              <a:rPr lang="en-US" sz="4800" dirty="0"/>
+              <a:t>           const </a:t>
+            </a:r>
+            <a:r>
+              <a:rPr lang="en-US" sz="4800" dirty="0" err="1"/>
+              <a:t>src</a:t>
+            </a:r>
+            <a:r>
+              <a:rPr lang="en-US" sz="4800" dirty="0"/>
+              <a:t> = 'http://localhost:8000/p01/IMAGES/heic2007a.jpg’</a:t>
+            </a:r>
+          </a:p>
+          <a:p>
+            <a:pPr marL="0" indent="0">
+              <a:lnSpc>
+                <a:spcPct val="120000"/>
+              </a:lnSpc>
+              <a:spcBef>
+                <a:spcPts val="0"/>
+              </a:spcBef>
+              <a:buNone/>
+            </a:pPr>
+            <a:r>
+              <a:rPr lang="en-US" sz="4800" dirty="0"/>
+              <a:t>           const </a:t>
+            </a:r>
+            <a:r>
+              <a:rPr lang="en-US" sz="4800" dirty="0" err="1"/>
+              <a:t>img</a:t>
+            </a:r>
+            <a:r>
+              <a:rPr lang="en-US" sz="4800" dirty="0"/>
+              <a:t> = </a:t>
+            </a:r>
+            <a:r>
+              <a:rPr lang="en-US" sz="4800" dirty="0" err="1"/>
+              <a:t>document.getElementById</a:t>
+            </a:r>
+            <a:r>
+              <a:rPr lang="en-US" sz="4800" dirty="0"/>
+              <a:t>('</a:t>
+            </a:r>
+            <a:r>
+              <a:rPr lang="en-US" sz="4800" b="1" dirty="0">
+                <a:solidFill>
+                  <a:srgbClr val="FF0000"/>
+                </a:solidFill>
+              </a:rPr>
+              <a:t>nebula</a:t>
+            </a:r>
+            <a:r>
+              <a:rPr lang="en-US" sz="4800" dirty="0"/>
+              <a:t>');</a:t>
+            </a:r>
+          </a:p>
+          <a:p>
+            <a:pPr marL="0" indent="0">
+              <a:lnSpc>
+                <a:spcPct val="120000"/>
+              </a:lnSpc>
+              <a:spcBef>
+                <a:spcPts val="0"/>
+              </a:spcBef>
+              <a:buNone/>
+            </a:pPr>
+            <a:r>
+              <a:rPr lang="en-US" sz="4800" dirty="0"/>
+              <a:t>           </a:t>
+            </a:r>
+            <a:r>
+              <a:rPr lang="en-US" sz="4800" dirty="0" err="1"/>
+              <a:t>img.setAttribute</a:t>
+            </a:r>
+            <a:r>
+              <a:rPr lang="en-US" sz="4800" dirty="0"/>
+              <a:t>('</a:t>
+            </a:r>
+            <a:r>
+              <a:rPr lang="en-US" sz="4800" dirty="0" err="1"/>
+              <a:t>src</a:t>
+            </a:r>
+            <a:r>
+              <a:rPr lang="en-US" sz="4800" dirty="0"/>
+              <a:t>', </a:t>
+            </a:r>
+            <a:r>
+              <a:rPr lang="en-US" sz="4800" dirty="0" err="1"/>
+              <a:t>src</a:t>
+            </a:r>
+            <a:r>
+              <a:rPr lang="en-US" sz="4800" dirty="0"/>
+              <a:t>);        // set it</a:t>
+            </a:r>
+          </a:p>
+          <a:p>
+            <a:pPr marL="0" indent="0">
+              <a:lnSpc>
+                <a:spcPct val="120000"/>
+              </a:lnSpc>
+              <a:spcBef>
+                <a:spcPts val="0"/>
+              </a:spcBef>
+              <a:buNone/>
+            </a:pPr>
+            <a:r>
+              <a:rPr lang="en-US" sz="4800" dirty="0"/>
+              <a:t>            </a:t>
+            </a:r>
+            <a:r>
+              <a:rPr lang="en-US" sz="4800" dirty="0" err="1"/>
+              <a:t>document.querySelector</a:t>
+            </a:r>
+            <a:r>
+              <a:rPr lang="en-US" sz="4800" dirty="0"/>
+              <a:t>('a-assets').</a:t>
+            </a:r>
+            <a:r>
+              <a:rPr lang="en-US" sz="4800" dirty="0" err="1"/>
+              <a:t>addEventListener</a:t>
+            </a:r>
+            <a:r>
+              <a:rPr lang="en-US" sz="4800" dirty="0"/>
+              <a:t>('loaded', () =&gt; {</a:t>
+            </a:r>
+          </a:p>
+          <a:p>
+            <a:pPr marL="0" indent="0">
+              <a:lnSpc>
+                <a:spcPct val="120000"/>
+              </a:lnSpc>
+              <a:spcBef>
+                <a:spcPts val="0"/>
+              </a:spcBef>
+              <a:buNone/>
+            </a:pPr>
+            <a:r>
+              <a:rPr lang="en-US" sz="4800" dirty="0"/>
+              <a:t>          	</a:t>
+            </a:r>
+            <a:r>
+              <a:rPr lang="en-US" sz="4800" dirty="0" err="1"/>
+              <a:t>document.getElementById</a:t>
+            </a:r>
+            <a:r>
+              <a:rPr lang="en-US" sz="4800" dirty="0"/>
+              <a:t>('</a:t>
+            </a:r>
+            <a:r>
+              <a:rPr lang="en-US" sz="4800" dirty="0" err="1"/>
+              <a:t>mySky</a:t>
+            </a:r>
+            <a:r>
+              <a:rPr lang="en-US" sz="4800" dirty="0"/>
+              <a:t>’).</a:t>
+            </a:r>
+            <a:r>
+              <a:rPr lang="en-US" sz="4800" dirty="0" err="1"/>
+              <a:t>setAttribute</a:t>
+            </a:r>
+            <a:r>
+              <a:rPr lang="en-US" sz="4800" dirty="0"/>
+              <a:t>('material', '</a:t>
+            </a:r>
+            <a:r>
+              <a:rPr lang="en-US" sz="4800" dirty="0" err="1"/>
+              <a:t>src</a:t>
+            </a:r>
+            <a:r>
+              <a:rPr lang="en-US" sz="4800" dirty="0"/>
+              <a:t>: #nebula');</a:t>
+            </a:r>
+          </a:p>
+          <a:p>
+            <a:pPr marL="0" indent="0">
+              <a:lnSpc>
+                <a:spcPct val="120000"/>
+              </a:lnSpc>
+              <a:spcBef>
+                <a:spcPts val="0"/>
+              </a:spcBef>
+              <a:buNone/>
+            </a:pPr>
+            <a:r>
+              <a:rPr lang="en-US" sz="4800" dirty="0"/>
+              <a:t>          });</a:t>
+            </a:r>
+          </a:p>
+          <a:p>
+            <a:pPr marL="0" indent="0">
+              <a:lnSpc>
+                <a:spcPct val="120000"/>
+              </a:lnSpc>
+              <a:spcBef>
+                <a:spcPts val="0"/>
+              </a:spcBef>
+              <a:buNone/>
+            </a:pPr>
+            <a:r>
+              <a:rPr lang="en-US" sz="4800" dirty="0"/>
+              <a:t>      &lt;/script&gt;</a:t>
+            </a:r>
+          </a:p>
+          <a:p>
+            <a:pPr marL="0" indent="0">
+              <a:lnSpc>
+                <a:spcPct val="120000"/>
+              </a:lnSpc>
+              <a:spcBef>
+                <a:spcPts val="0"/>
+              </a:spcBef>
+              <a:buNone/>
+            </a:pPr>
+            <a:r>
+              <a:rPr lang="en-US" sz="4800" dirty="0"/>
+              <a:t>     &lt;a-scene&gt; </a:t>
+            </a:r>
+          </a:p>
+          <a:p>
+            <a:pPr marL="0" indent="0">
+              <a:lnSpc>
+                <a:spcPct val="120000"/>
+              </a:lnSpc>
+              <a:spcBef>
+                <a:spcPts val="0"/>
+              </a:spcBef>
+              <a:buNone/>
+            </a:pPr>
+            <a:r>
+              <a:rPr lang="en-US" sz="4800" dirty="0"/>
+              <a:t>      &lt;a-assets&gt;</a:t>
+            </a:r>
+          </a:p>
+          <a:p>
+            <a:pPr marL="0" indent="0">
+              <a:lnSpc>
+                <a:spcPct val="120000"/>
+              </a:lnSpc>
+              <a:spcBef>
+                <a:spcPts val="0"/>
+              </a:spcBef>
+              <a:buNone/>
+            </a:pPr>
+            <a:r>
+              <a:rPr lang="en-US" sz="4800" dirty="0"/>
+              <a:t>          &lt;</a:t>
+            </a:r>
+            <a:r>
+              <a:rPr lang="en-US" sz="4800" dirty="0" err="1"/>
+              <a:t>img</a:t>
+            </a:r>
+            <a:r>
+              <a:rPr lang="en-US" sz="4800" dirty="0"/>
+              <a:t> id="</a:t>
+            </a:r>
+            <a:r>
+              <a:rPr lang="en-US" sz="4800" b="1" dirty="0">
+                <a:solidFill>
+                  <a:srgbClr val="FF0000"/>
+                </a:solidFill>
+              </a:rPr>
+              <a:t>nebula</a:t>
+            </a:r>
+            <a:r>
+              <a:rPr lang="en-US" sz="4800" dirty="0"/>
+              <a:t>" </a:t>
+            </a:r>
+            <a:r>
+              <a:rPr lang="en-US" sz="4800" dirty="0" err="1"/>
+              <a:t>crossorigin</a:t>
+            </a:r>
+            <a:r>
+              <a:rPr lang="en-US" sz="4800" dirty="0"/>
+              <a:t>="anonymous"&gt;</a:t>
+            </a:r>
+          </a:p>
+          <a:p>
+            <a:pPr marL="0" indent="0">
+              <a:lnSpc>
+                <a:spcPct val="120000"/>
+              </a:lnSpc>
+              <a:spcBef>
+                <a:spcPts val="0"/>
+              </a:spcBef>
+              <a:buNone/>
+            </a:pPr>
+            <a:r>
+              <a:rPr lang="en-US" sz="4800" dirty="0"/>
+              <a:t>      &lt;/a-assets&gt;</a:t>
+            </a:r>
+          </a:p>
+          <a:p>
+            <a:pPr marL="0" indent="0">
+              <a:lnSpc>
+                <a:spcPct val="120000"/>
+              </a:lnSpc>
+              <a:spcBef>
+                <a:spcPts val="0"/>
+              </a:spcBef>
+              <a:buNone/>
+            </a:pPr>
+            <a:r>
+              <a:rPr lang="en-US" sz="4800" dirty="0"/>
+              <a:t>        </a:t>
+            </a:r>
+          </a:p>
+          <a:p>
+            <a:pPr marL="0" indent="0">
+              <a:lnSpc>
+                <a:spcPct val="120000"/>
+              </a:lnSpc>
+              <a:spcBef>
+                <a:spcPts val="0"/>
+              </a:spcBef>
+              <a:buNone/>
+            </a:pPr>
+            <a:r>
+              <a:rPr lang="en-US" sz="4800" dirty="0"/>
+              <a:t>          &lt;a-sky id="</a:t>
+            </a:r>
+            <a:r>
+              <a:rPr lang="en-US" sz="4800" dirty="0" err="1"/>
+              <a:t>mySky</a:t>
+            </a:r>
+            <a:r>
+              <a:rPr lang="en-US" sz="4800" dirty="0"/>
+              <a:t>"</a:t>
+            </a:r>
+          </a:p>
+          <a:p>
+            <a:pPr marL="0" indent="0">
+              <a:lnSpc>
+                <a:spcPct val="120000"/>
+              </a:lnSpc>
+              <a:spcBef>
+                <a:spcPts val="0"/>
+              </a:spcBef>
+              <a:buNone/>
+            </a:pPr>
+            <a:r>
+              <a:rPr lang="en-US" sz="4800" dirty="0"/>
+              <a:t>            	</a:t>
+            </a:r>
+            <a:r>
+              <a:rPr lang="en-US" sz="4800" b="1" dirty="0" err="1">
+                <a:solidFill>
+                  <a:srgbClr val="FF0000"/>
+                </a:solidFill>
+              </a:rPr>
+              <a:t>src</a:t>
+            </a:r>
+            <a:r>
+              <a:rPr lang="en-US" sz="4800" b="1" dirty="0">
+                <a:solidFill>
+                  <a:srgbClr val="FF0000"/>
+                </a:solidFill>
+              </a:rPr>
+              <a:t>="#nebula“ </a:t>
+            </a:r>
+            <a:r>
+              <a:rPr lang="en-US" sz="4800" dirty="0"/>
+              <a:t>position="-2.5  0 -1.5"</a:t>
+            </a:r>
+          </a:p>
+          <a:p>
+            <a:pPr marL="0" indent="0">
+              <a:lnSpc>
+                <a:spcPct val="120000"/>
+              </a:lnSpc>
+              <a:spcBef>
+                <a:spcPts val="0"/>
+              </a:spcBef>
+              <a:buNone/>
+            </a:pPr>
+            <a:r>
+              <a:rPr lang="en-US" sz="4800" dirty="0"/>
+              <a:t>          &gt;&lt;/a-sky&gt;	  </a:t>
+            </a:r>
+          </a:p>
+          <a:p>
+            <a:pPr marL="0" indent="0">
+              <a:lnSpc>
+                <a:spcPct val="120000"/>
+              </a:lnSpc>
+              <a:spcBef>
+                <a:spcPts val="0"/>
+              </a:spcBef>
+              <a:buNone/>
+            </a:pPr>
+            <a:r>
+              <a:rPr lang="en-US" sz="4800" dirty="0"/>
+              <a:t>          &lt;a-text</a:t>
+            </a:r>
+          </a:p>
+          <a:p>
+            <a:pPr marL="0" indent="0">
+              <a:lnSpc>
+                <a:spcPct val="120000"/>
+              </a:lnSpc>
+              <a:spcBef>
+                <a:spcPts val="0"/>
+              </a:spcBef>
+              <a:buNone/>
+            </a:pPr>
+            <a:r>
+              <a:rPr lang="en-US" sz="4800" dirty="0"/>
+              <a:t>            font="</a:t>
+            </a:r>
+            <a:r>
+              <a:rPr lang="en-US" sz="4800" dirty="0" err="1"/>
+              <a:t>kelsonsans</a:t>
+            </a:r>
+            <a:r>
+              <a:rPr lang="en-US" sz="4800" dirty="0"/>
+              <a:t>"</a:t>
+            </a:r>
+          </a:p>
+          <a:p>
+            <a:pPr marL="0" indent="0">
+              <a:lnSpc>
+                <a:spcPct val="120000"/>
+              </a:lnSpc>
+              <a:spcBef>
+                <a:spcPts val="0"/>
+              </a:spcBef>
+              <a:buNone/>
+            </a:pPr>
+            <a:r>
+              <a:rPr lang="en-US" sz="4800" dirty="0"/>
+              <a:t>            color = "#FFFFFF"</a:t>
+            </a:r>
+          </a:p>
+          <a:p>
+            <a:pPr marL="0" indent="0">
+              <a:lnSpc>
+                <a:spcPct val="120000"/>
+              </a:lnSpc>
+              <a:spcBef>
+                <a:spcPts val="0"/>
+              </a:spcBef>
+              <a:buNone/>
+            </a:pPr>
+            <a:r>
+              <a:rPr lang="en-US" sz="4800" dirty="0"/>
+              <a:t>            value="HELLO A-Frame from EARTH!!!"</a:t>
+            </a:r>
+          </a:p>
+          <a:p>
+            <a:pPr marL="0" indent="0">
+              <a:lnSpc>
+                <a:spcPct val="120000"/>
+              </a:lnSpc>
+              <a:spcBef>
+                <a:spcPts val="0"/>
+              </a:spcBef>
+              <a:buNone/>
+            </a:pPr>
+            <a:r>
+              <a:rPr lang="en-US" sz="4800" dirty="0"/>
+              <a:t>            width="6"</a:t>
+            </a:r>
+          </a:p>
+          <a:p>
+            <a:pPr marL="0" indent="0">
+              <a:lnSpc>
+                <a:spcPct val="120000"/>
+              </a:lnSpc>
+              <a:spcBef>
+                <a:spcPts val="0"/>
+              </a:spcBef>
+              <a:buNone/>
+            </a:pPr>
+            <a:r>
+              <a:rPr lang="en-US" sz="4800" dirty="0"/>
+              <a:t>        position="0 -1 -5"</a:t>
+            </a:r>
+          </a:p>
+          <a:p>
+            <a:pPr marL="0" indent="0">
+              <a:lnSpc>
+                <a:spcPct val="120000"/>
+              </a:lnSpc>
+              <a:spcBef>
+                <a:spcPts val="0"/>
+              </a:spcBef>
+              <a:buNone/>
+            </a:pPr>
+            <a:r>
+              <a:rPr lang="en-US" sz="4800" dirty="0"/>
+              <a:t>          &gt;&lt;/a-text&gt;</a:t>
+            </a:r>
+          </a:p>
+          <a:p>
+            <a:pPr marL="0" indent="0">
+              <a:lnSpc>
+                <a:spcPct val="120000"/>
+              </a:lnSpc>
+              <a:spcBef>
+                <a:spcPts val="0"/>
+              </a:spcBef>
+              <a:buNone/>
+            </a:pPr>
+            <a:r>
+              <a:rPr lang="en-US" sz="4800" dirty="0"/>
+              <a:t>    &lt;/a-scene&gt;</a:t>
+            </a:r>
+          </a:p>
+        </p:txBody>
+      </p:sp>
+    </p:spTree>
+    <p:extLst>
+      <p:ext uri="{BB962C8B-B14F-4D97-AF65-F5344CB8AC3E}">
+        <p14:creationId xmlns:p14="http://schemas.microsoft.com/office/powerpoint/2010/main" val="511201687"/>
+      </p:ext>
+    </p:extLst>
+  </p:cSld>
+  <p:clrMapOvr>
+    <a:masterClrMapping/>
+  </p:clrMapOvr>
+</p:sld>
+</file>
+
+<file path=ppt/slides/slide16.xml><?xml version="1.0" encoding="utf-8"?>
+<p:sld xmlns:a="http://schemas.openxmlformats.org/drawingml/2006/main" xmlns:r="http://schemas.openxmlformats.org/officeDocument/2006/relationships" xmlns:p="http://schemas.openxmlformats.org/presentationml/2006/main">
+  <p:cSld>
+    <p:spTree>
+      <p:nvGrpSpPr>
+        <p:cNvPr id="1" name=""/>
+        <p:cNvGrpSpPr/>
+        <p:nvPr/>
+      </p:nvGrpSpPr>
+      <p:grpSpPr>
+        <a:xfrm>
+          <a:off x="0" y="0"/>
+          <a:ext cx="0" cy="0"/>
+          <a:chOff x="0" y="0"/>
+          <a:chExt cx="0" cy="0"/>
+        </a:xfrm>
+      </p:grpSpPr>
+      <p:sp>
+        <p:nvSpPr>
+          <p:cNvPr id="2" name="Title 1">
+            <a:extLst>
+              <a:ext uri="{FF2B5EF4-FFF2-40B4-BE49-F238E27FC236}">
                 <a16:creationId xmlns:a16="http://schemas.microsoft.com/office/drawing/2014/main" id="{F85E1747-140B-31BE-3B30-AC6CA914F451}"/>
               </a:ext>
             </a:extLst>
@@ -9795,7 +10397,7 @@
 </p:sld>
 </file>
 
-<file path=ppt/slides/slide16.xml><?xml version="1.0" encoding="utf-8"?>
+<file path=ppt/slides/slide17.xml><?xml version="1.0" encoding="utf-8"?>
 <p:sld xmlns:a="http://schemas.openxmlformats.org/drawingml/2006/main" xmlns:r="http://schemas.openxmlformats.org/officeDocument/2006/relationships" xmlns:p="http://schemas.openxmlformats.org/presentationml/2006/main">
   <p:cSld>
     <p:spTree>
@@ -9854,7 +10456,7 @@
 </p:sld>
 </file>
 
-<file path=ppt/slides/slide17.xml><?xml version="1.0" encoding="utf-8"?>
+<file path=ppt/slides/slide18.xml><?xml version="1.0" encoding="utf-8"?>
 <p:sld xmlns:a="http://schemas.openxmlformats.org/drawingml/2006/main" xmlns:r="http://schemas.openxmlformats.org/officeDocument/2006/relationships" xmlns:p="http://schemas.openxmlformats.org/presentationml/2006/main">
   <p:cSld>
     <p:spTree>
@@ -10103,7 +10705,7 @@
 </p:sld>
 </file>
 
-<file path=ppt/slides/slide18.xml><?xml version="1.0" encoding="utf-8"?>
+<file path=ppt/slides/slide19.xml><?xml version="1.0" encoding="utf-8"?>
 <p:sld xmlns:a="http://schemas.openxmlformats.org/drawingml/2006/main" xmlns:r="http://schemas.openxmlformats.org/officeDocument/2006/relationships" xmlns:p="http://schemas.openxmlformats.org/presentationml/2006/main">
   <p:cSld>
     <p:spTree>
@@ -11859,7 +12461,7 @@
                   <a:srgbClr val="0070C0"/>
                 </a:solidFill>
               </a:rPr>
-              <a:t>Terminal&gt; python –m </a:t>
+              <a:t>Terminal&gt; python3 –m </a:t>
             </a:r>
             <a:r>
               <a:rPr lang="en-US" b="1" dirty="0" err="1">

--- a/p01/VR-A-Frame-introduction.pptx
+++ b/p01/VR-A-Frame-introduction.pptx
@@ -3288,7 +3288,7 @@
           <a:p>
             <a:fld id="{846CE7D5-CF57-46EF-B807-FDD0502418D4}" type="datetimeFigureOut">
               <a:rPr lang="en-US" smtClean="0"/>
-              <a:t>10/7/2026</a:t>
+              <a:t>10/8/2026</a:t>
             </a:fld>
             <a:endParaRPr lang="en-US"/>
           </a:p>
@@ -3458,7 +3458,7 @@
           <a:p>
             <a:fld id="{846CE7D5-CF57-46EF-B807-FDD0502418D4}" type="datetimeFigureOut">
               <a:rPr lang="en-US" smtClean="0"/>
-              <a:t>10/7/2026</a:t>
+              <a:t>10/8/2026</a:t>
             </a:fld>
             <a:endParaRPr lang="en-US"/>
           </a:p>
@@ -3638,7 +3638,7 @@
           <a:p>
             <a:fld id="{846CE7D5-CF57-46EF-B807-FDD0502418D4}" type="datetimeFigureOut">
               <a:rPr lang="en-US" smtClean="0"/>
-              <a:t>10/7/2026</a:t>
+              <a:t>10/8/2026</a:t>
             </a:fld>
             <a:endParaRPr lang="en-US"/>
           </a:p>
@@ -3808,7 +3808,7 @@
           <a:p>
             <a:fld id="{846CE7D5-CF57-46EF-B807-FDD0502418D4}" type="datetimeFigureOut">
               <a:rPr lang="en-US" smtClean="0"/>
-              <a:t>10/7/2026</a:t>
+              <a:t>10/8/2026</a:t>
             </a:fld>
             <a:endParaRPr lang="en-US"/>
           </a:p>
@@ -4054,7 +4054,7 @@
           <a:p>
             <a:fld id="{846CE7D5-CF57-46EF-B807-FDD0502418D4}" type="datetimeFigureOut">
               <a:rPr lang="en-US" smtClean="0"/>
-              <a:t>10/7/2026</a:t>
+              <a:t>10/8/2026</a:t>
             </a:fld>
             <a:endParaRPr lang="en-US"/>
           </a:p>
@@ -4286,7 +4286,7 @@
           <a:p>
             <a:fld id="{846CE7D5-CF57-46EF-B807-FDD0502418D4}" type="datetimeFigureOut">
               <a:rPr lang="en-US" smtClean="0"/>
-              <a:t>10/7/2026</a:t>
+              <a:t>10/8/2026</a:t>
             </a:fld>
             <a:endParaRPr lang="en-US"/>
           </a:p>
@@ -4653,7 +4653,7 @@
           <a:p>
             <a:fld id="{846CE7D5-CF57-46EF-B807-FDD0502418D4}" type="datetimeFigureOut">
               <a:rPr lang="en-US" smtClean="0"/>
-              <a:t>10/7/2026</a:t>
+              <a:t>10/8/2026</a:t>
             </a:fld>
             <a:endParaRPr lang="en-US"/>
           </a:p>
@@ -4771,7 +4771,7 @@
           <a:p>
             <a:fld id="{846CE7D5-CF57-46EF-B807-FDD0502418D4}" type="datetimeFigureOut">
               <a:rPr lang="en-US" smtClean="0"/>
-              <a:t>10/7/2026</a:t>
+              <a:t>10/8/2026</a:t>
             </a:fld>
             <a:endParaRPr lang="en-US"/>
           </a:p>
@@ -4866,7 +4866,7 @@
           <a:p>
             <a:fld id="{846CE7D5-CF57-46EF-B807-FDD0502418D4}" type="datetimeFigureOut">
               <a:rPr lang="en-US" smtClean="0"/>
-              <a:t>10/7/2026</a:t>
+              <a:t>10/8/2026</a:t>
             </a:fld>
             <a:endParaRPr lang="en-US"/>
           </a:p>
@@ -5143,7 +5143,7 @@
           <a:p>
             <a:fld id="{846CE7D5-CF57-46EF-B807-FDD0502418D4}" type="datetimeFigureOut">
               <a:rPr lang="en-US" smtClean="0"/>
-              <a:t>10/7/2026</a:t>
+              <a:t>10/8/2026</a:t>
             </a:fld>
             <a:endParaRPr lang="en-US"/>
           </a:p>
@@ -5400,7 +5400,7 @@
           <a:p>
             <a:fld id="{846CE7D5-CF57-46EF-B807-FDD0502418D4}" type="datetimeFigureOut">
               <a:rPr lang="en-US" smtClean="0"/>
-              <a:t>10/7/2026</a:t>
+              <a:t>10/8/2026</a:t>
             </a:fld>
             <a:endParaRPr lang="en-US"/>
           </a:p>
@@ -5613,7 +5613,7 @@
           <a:p>
             <a:fld id="{846CE7D5-CF57-46EF-B807-FDD0502418D4}" type="datetimeFigureOut">
               <a:rPr lang="en-US" smtClean="0"/>
-              <a:t>10/7/2026</a:t>
+              <a:t>10/8/2026</a:t>
             </a:fld>
             <a:endParaRPr lang="en-US"/>
           </a:p>
@@ -10657,7 +10657,7 @@
             </a:r>
             <a:r>
               <a:rPr lang="en-US" dirty="0"/>
-              <a:t>"&gt;  &lt;!-- OLD a-frame here --&gt;</a:t>
+              <a:t>"&gt;  &lt;!-- LOCAL a-frame here --&gt;</a:t>
             </a:r>
           </a:p>
           <a:p>
@@ -10666,7 +10666,7 @@
             </a:pPr>
             <a:r>
               <a:rPr lang="en-US" dirty="0"/>
-              <a:t>						&lt;!-- NEW a-frame in </a:t>
+              <a:t>						     &lt;!-- Network a-frame in </a:t>
             </a:r>
             <a:r>
               <a:rPr lang="en-US" dirty="0">
@@ -12011,8 +12011,8 @@
         </p:nvSpPr>
         <p:spPr>
           <a:xfrm>
-            <a:off x="1010652" y="2342148"/>
-            <a:ext cx="2197768" cy="3761205"/>
+            <a:off x="746282" y="1480780"/>
+            <a:ext cx="3313162" cy="4622574"/>
           </a:xfrm>
           <a:prstGeom prst="bevel">
             <a:avLst/>
@@ -12068,8 +12068,8 @@
         </p:nvSpPr>
         <p:spPr>
           <a:xfrm>
-            <a:off x="5887447" y="2749989"/>
-            <a:ext cx="2967789" cy="2326105"/>
+            <a:off x="4690913" y="2749990"/>
+            <a:ext cx="6048161" cy="1772806"/>
           </a:xfrm>
           <a:prstGeom prst="cube">
             <a:avLst/>
@@ -12097,63 +12097,16 @@
           <a:p>
             <a:pPr algn="ctr"/>
             <a:r>
-              <a:rPr lang="en-US" dirty="0" err="1"/>
-              <a:t>Github</a:t>
-            </a:r>
-            <a:r>
               <a:rPr lang="en-US" dirty="0"/>
-              <a:t> pages</a:t>
-            </a:r>
-          </a:p>
-        </p:txBody>
-      </p:sp>
-      <p:sp>
-        <p:nvSpPr>
-          <p:cNvPr id="6" name="Half Frame 5">
-            <a:extLst>
-              <a:ext uri="{FF2B5EF4-FFF2-40B4-BE49-F238E27FC236}">
-                <a16:creationId xmlns:a16="http://schemas.microsoft.com/office/drawing/2014/main" id="{5F177F3F-096F-499A-6C7A-C5FC965245FF}"/>
-              </a:ext>
-            </a:extLst>
-          </p:cNvPr>
-          <p:cNvSpPr/>
-          <p:nvPr/>
-        </p:nvSpPr>
-        <p:spPr>
-          <a:xfrm>
-            <a:off x="4533642" y="2075312"/>
-            <a:ext cx="930443" cy="1026694"/>
-          </a:xfrm>
-          <a:prstGeom prst="halfFrame">
-            <a:avLst/>
-          </a:prstGeom>
-        </p:spPr>
-        <p:style>
-          <a:lnRef idx="2">
-            <a:schemeClr val="dk1">
-              <a:shade val="15000"/>
-            </a:schemeClr>
-          </a:lnRef>
-          <a:fillRef idx="1">
-            <a:schemeClr val="dk1"/>
-          </a:fillRef>
-          <a:effectRef idx="0">
-            <a:schemeClr val="dk1"/>
-          </a:effectRef>
-          <a:fontRef idx="minor">
-            <a:schemeClr val="lt1"/>
-          </a:fontRef>
-        </p:style>
-        <p:txBody>
-          <a:bodyPr rtlCol="0" anchor="ctr"/>
-          <a:lstStyle/>
+              <a:t>https://github.com/wonder-phil/wonder-phil.github.io </a:t>
+            </a:r>
+          </a:p>
           <a:p>
             <a:pPr algn="ctr"/>
-            <a:endParaRPr lang="en-US">
-              <a:solidFill>
-                <a:schemeClr val="tx1"/>
-              </a:solidFill>
-            </a:endParaRPr>
+            <a:r>
+              <a:rPr lang="en-US" dirty="0"/>
+              <a:t>wonder-phil.github.io</a:t>
+            </a:r>
           </a:p>
         </p:txBody>
       </p:sp>
@@ -12257,8 +12210,8 @@
         </p:nvSpPr>
         <p:spPr>
           <a:xfrm>
-            <a:off x="1298934" y="4306314"/>
-            <a:ext cx="1605152" cy="1271636"/>
+            <a:off x="1059658" y="4074936"/>
+            <a:ext cx="2592392" cy="1271636"/>
           </a:xfrm>
           <a:prstGeom prst="cube">
             <a:avLst/>
@@ -12286,13 +12239,158 @@
           <a:p>
             <a:pPr algn="ctr"/>
             <a:r>
-              <a:rPr lang="en-US" dirty="0" err="1"/>
-              <a:t>Github</a:t>
-            </a:r>
-            <a:r>
               <a:rPr lang="en-US" dirty="0"/>
-              <a:t> pages</a:t>
-            </a:r>
+              <a:t>wonder-phil.github.io pages</a:t>
+            </a:r>
+          </a:p>
+        </p:txBody>
+      </p:sp>
+      <p:sp>
+        <p:nvSpPr>
+          <p:cNvPr id="11" name="Cube 10">
+            <a:extLst>
+              <a:ext uri="{FF2B5EF4-FFF2-40B4-BE49-F238E27FC236}">
+                <a16:creationId xmlns:a16="http://schemas.microsoft.com/office/drawing/2014/main" id="{2793432D-ECEA-F343-8961-D7A55ED5C62B}"/>
+              </a:ext>
+            </a:extLst>
+          </p:cNvPr>
+          <p:cNvSpPr/>
+          <p:nvPr/>
+        </p:nvSpPr>
+        <p:spPr>
+          <a:xfrm>
+            <a:off x="4690913" y="4649999"/>
+            <a:ext cx="6048161" cy="1772806"/>
+          </a:xfrm>
+          <a:prstGeom prst="cube">
+            <a:avLst/>
+          </a:prstGeom>
+        </p:spPr>
+        <p:style>
+          <a:lnRef idx="2">
+            <a:schemeClr val="accent2">
+              <a:shade val="15000"/>
+            </a:schemeClr>
+          </a:lnRef>
+          <a:fillRef idx="1">
+            <a:schemeClr val="accent2"/>
+          </a:fillRef>
+          <a:effectRef idx="0">
+            <a:schemeClr val="accent2"/>
+          </a:effectRef>
+          <a:fontRef idx="minor">
+            <a:schemeClr val="lt1"/>
+          </a:fontRef>
+        </p:style>
+        <p:txBody>
+          <a:bodyPr rtlCol="0" anchor="ctr"/>
+          <a:lstStyle/>
+          <a:p>
+            <a:pPr algn="ctr"/>
+            <a:r>
+              <a:rPr lang="en-US" dirty="0"/>
+              <a:t>wonder-phil.github.io</a:t>
+            </a:r>
+          </a:p>
+        </p:txBody>
+      </p:sp>
+      <p:sp>
+        <p:nvSpPr>
+          <p:cNvPr id="13" name="Half Frame 12">
+            <a:extLst>
+              <a:ext uri="{FF2B5EF4-FFF2-40B4-BE49-F238E27FC236}">
+                <a16:creationId xmlns:a16="http://schemas.microsoft.com/office/drawing/2014/main" id="{49F9F893-6F82-B6E8-22FB-518363B30C4A}"/>
+              </a:ext>
+            </a:extLst>
+          </p:cNvPr>
+          <p:cNvSpPr/>
+          <p:nvPr/>
+        </p:nvSpPr>
+        <p:spPr>
+          <a:xfrm>
+            <a:off x="4690913" y="3193928"/>
+            <a:ext cx="627369" cy="828612"/>
+          </a:xfrm>
+          <a:prstGeom prst="halfFrame">
+            <a:avLst/>
+          </a:prstGeom>
+        </p:spPr>
+        <p:style>
+          <a:lnRef idx="2">
+            <a:schemeClr val="dk1">
+              <a:shade val="15000"/>
+            </a:schemeClr>
+          </a:lnRef>
+          <a:fillRef idx="1">
+            <a:schemeClr val="dk1"/>
+          </a:fillRef>
+          <a:effectRef idx="0">
+            <a:schemeClr val="dk1"/>
+          </a:effectRef>
+          <a:fontRef idx="minor">
+            <a:schemeClr val="lt1"/>
+          </a:fontRef>
+        </p:style>
+        <p:txBody>
+          <a:bodyPr rtlCol="0" anchor="ctr"/>
+          <a:lstStyle/>
+          <a:p>
+            <a:pPr algn="ctr"/>
+            <a:endParaRPr lang="en-US">
+              <a:solidFill>
+                <a:schemeClr val="tx1"/>
+              </a:solidFill>
+            </a:endParaRPr>
+          </a:p>
+        </p:txBody>
+      </p:sp>
+      <p:sp>
+        <p:nvSpPr>
+          <p:cNvPr id="15" name="Half Frame 14">
+            <a:extLst>
+              <a:ext uri="{FF2B5EF4-FFF2-40B4-BE49-F238E27FC236}">
+                <a16:creationId xmlns:a16="http://schemas.microsoft.com/office/drawing/2014/main" id="{BF873AFC-693D-89C5-B5F8-0034581689F4}"/>
+              </a:ext>
+            </a:extLst>
+          </p:cNvPr>
+          <p:cNvSpPr/>
+          <p:nvPr/>
+        </p:nvSpPr>
+        <p:spPr>
+          <a:xfrm>
+            <a:off x="4690913" y="5093119"/>
+            <a:ext cx="627369" cy="828612"/>
+          </a:xfrm>
+          <a:prstGeom prst="halfFrame">
+            <a:avLst/>
+          </a:prstGeom>
+        </p:spPr>
+        <p:style>
+          <a:lnRef idx="2">
+            <a:schemeClr val="dk1">
+              <a:shade val="15000"/>
+            </a:schemeClr>
+          </a:lnRef>
+          <a:fillRef idx="1">
+            <a:schemeClr val="dk1"/>
+          </a:fillRef>
+          <a:effectRef idx="0">
+            <a:schemeClr val="dk1"/>
+          </a:effectRef>
+          <a:fontRef idx="minor">
+            <a:schemeClr val="lt1"/>
+          </a:fontRef>
+        </p:style>
+        <p:txBody>
+          <a:bodyPr rtlCol="0" anchor="ctr"/>
+          <a:lstStyle/>
+          <a:p>
+            <a:pPr algn="ctr"/>
+            <a:endParaRPr lang="en-US">
+              <a:solidFill>
+                <a:schemeClr val="tx1"/>
+              </a:solidFill>
+            </a:endParaRPr>
           </a:p>
         </p:txBody>
       </p:sp>
